--- a/ゲーム科1年/00_前期/ゲームプログラミングⅢ/03_Excelでマップエディタ（C++側）.pptx
+++ b/ゲーム科1年/00_前期/ゲームプログラミングⅢ/03_Excelでマップエディタ（C++側）.pptx
@@ -264,7 +264,7 @@
           <a:p>
             <a:fld id="{E9CC885B-4903-4D54-9A93-00025F12DED9}" type="datetimeFigureOut">
               <a:rPr kumimoji="1" lang="ja-JP" altLang="en-US" smtClean="0"/>
-              <a:t>2024/12/4</a:t>
+              <a:t>2026/6/22</a:t>
             </a:fld>
             <a:endParaRPr kumimoji="1" lang="ja-JP" altLang="en-US"/>
           </a:p>
@@ -494,7 +494,7 @@
           <a:p>
             <a:fld id="{E9CC885B-4903-4D54-9A93-00025F12DED9}" type="datetimeFigureOut">
               <a:rPr kumimoji="1" lang="ja-JP" altLang="en-US" smtClean="0"/>
-              <a:t>2024/12/4</a:t>
+              <a:t>2026/6/22</a:t>
             </a:fld>
             <a:endParaRPr kumimoji="1" lang="ja-JP" altLang="en-US"/>
           </a:p>
@@ -734,7 +734,7 @@
           <a:p>
             <a:fld id="{E9CC885B-4903-4D54-9A93-00025F12DED9}" type="datetimeFigureOut">
               <a:rPr kumimoji="1" lang="ja-JP" altLang="en-US" smtClean="0"/>
-              <a:t>2024/12/4</a:t>
+              <a:t>2026/6/22</a:t>
             </a:fld>
             <a:endParaRPr kumimoji="1" lang="ja-JP" altLang="en-US"/>
           </a:p>
@@ -964,7 +964,7 @@
           <a:p>
             <a:fld id="{E9CC885B-4903-4D54-9A93-00025F12DED9}" type="datetimeFigureOut">
               <a:rPr kumimoji="1" lang="ja-JP" altLang="en-US" smtClean="0"/>
-              <a:t>2024/12/4</a:t>
+              <a:t>2026/6/22</a:t>
             </a:fld>
             <a:endParaRPr kumimoji="1" lang="ja-JP" altLang="en-US"/>
           </a:p>
@@ -1239,7 +1239,7 @@
           <a:p>
             <a:fld id="{E9CC885B-4903-4D54-9A93-00025F12DED9}" type="datetimeFigureOut">
               <a:rPr kumimoji="1" lang="ja-JP" altLang="en-US" smtClean="0"/>
-              <a:t>2024/12/4</a:t>
+              <a:t>2026/6/22</a:t>
             </a:fld>
             <a:endParaRPr kumimoji="1" lang="ja-JP" altLang="en-US"/>
           </a:p>
@@ -1568,7 +1568,7 @@
           <a:p>
             <a:fld id="{E9CC885B-4903-4D54-9A93-00025F12DED9}" type="datetimeFigureOut">
               <a:rPr kumimoji="1" lang="ja-JP" altLang="en-US" smtClean="0"/>
-              <a:t>2024/12/4</a:t>
+              <a:t>2026/6/22</a:t>
             </a:fld>
             <a:endParaRPr kumimoji="1" lang="ja-JP" altLang="en-US"/>
           </a:p>
@@ -2044,7 +2044,7 @@
           <a:p>
             <a:fld id="{E9CC885B-4903-4D54-9A93-00025F12DED9}" type="datetimeFigureOut">
               <a:rPr kumimoji="1" lang="ja-JP" altLang="en-US" smtClean="0"/>
-              <a:t>2024/12/4</a:t>
+              <a:t>2026/6/22</a:t>
             </a:fld>
             <a:endParaRPr kumimoji="1" lang="ja-JP" altLang="en-US"/>
           </a:p>
@@ -2185,7 +2185,7 @@
           <a:p>
             <a:fld id="{E9CC885B-4903-4D54-9A93-00025F12DED9}" type="datetimeFigureOut">
               <a:rPr kumimoji="1" lang="ja-JP" altLang="en-US" smtClean="0"/>
-              <a:t>2024/12/4</a:t>
+              <a:t>2026/6/22</a:t>
             </a:fld>
             <a:endParaRPr kumimoji="1" lang="ja-JP" altLang="en-US"/>
           </a:p>
@@ -2298,7 +2298,7 @@
           <a:p>
             <a:fld id="{E9CC885B-4903-4D54-9A93-00025F12DED9}" type="datetimeFigureOut">
               <a:rPr kumimoji="1" lang="ja-JP" altLang="en-US" smtClean="0"/>
-              <a:t>2024/12/4</a:t>
+              <a:t>2026/6/22</a:t>
             </a:fld>
             <a:endParaRPr kumimoji="1" lang="ja-JP" altLang="en-US"/>
           </a:p>
@@ -2641,7 +2641,7 @@
           <a:p>
             <a:fld id="{E9CC885B-4903-4D54-9A93-00025F12DED9}" type="datetimeFigureOut">
               <a:rPr kumimoji="1" lang="ja-JP" altLang="en-US" smtClean="0"/>
-              <a:t>2024/12/4</a:t>
+              <a:t>2026/6/22</a:t>
             </a:fld>
             <a:endParaRPr kumimoji="1" lang="ja-JP" altLang="en-US"/>
           </a:p>
@@ -2929,7 +2929,7 @@
           <a:p>
             <a:fld id="{E9CC885B-4903-4D54-9A93-00025F12DED9}" type="datetimeFigureOut">
               <a:rPr kumimoji="1" lang="ja-JP" altLang="en-US" smtClean="0"/>
-              <a:t>2024/12/4</a:t>
+              <a:t>2026/6/22</a:t>
             </a:fld>
             <a:endParaRPr kumimoji="1" lang="ja-JP" altLang="en-US"/>
           </a:p>
@@ -3202,7 +3202,7 @@
           <a:p>
             <a:fld id="{E9CC885B-4903-4D54-9A93-00025F12DED9}" type="datetimeFigureOut">
               <a:rPr kumimoji="1" lang="ja-JP" altLang="en-US" smtClean="0"/>
-              <a:t>2024/12/4</a:t>
+              <a:t>2026/6/22</a:t>
             </a:fld>
             <a:endParaRPr kumimoji="1" lang="ja-JP" altLang="en-US"/>
           </a:p>
@@ -4375,7 +4375,7 @@
         <p:spPr>
           <a:xfrm>
             <a:off x="567541" y="3944238"/>
-            <a:ext cx="8715848" cy="830997"/>
+            <a:ext cx="8900193" cy="830997"/>
           </a:xfrm>
           <a:prstGeom prst="rect">
             <a:avLst/>
@@ -4430,7 +4430,7 @@
                   <a:srgbClr val="FF0000"/>
                 </a:solidFill>
               </a:rPr>
-              <a:t>getc</a:t>
+              <a:t>fgetc</a:t>
             </a:r>
             <a:r>
               <a:rPr kumimoji="1" lang="ja-JP" altLang="en-US" sz="2400" b="1" dirty="0">
